--- a/docs/descargas/presentacion-ai-clauses.pptx
+++ b/docs/descargas/presentacion-ai-clauses.pptx
@@ -3963,7 +3963,7 @@
                 <a:ea typeface="Calibri" pitchFamily="34" charset="-122"/>
                 <a:cs typeface="Calibri" pitchFamily="34" charset="-120"/>
               </a:rPr>
-              <a:t>De ella nace el proyecto y suya es la primera redacción. Y suyo es el mérito menos visible: llevarlo a los servicios de contratación y jurídicos de su propio ayuntamiento y traer sus objeciones de vuelta enteras.</a:t>
+              <a:t>De ella nace el proyecto y suya es la primera redacción. Y suyo es el mérito menos visible: escuchar a quienes conocen la práctica real de la contratación y recoger sus aportaciones íntegras, también las que obligaban a rehacer lo ya escrito.</a:t>
             </a:r>
             <a:endParaRPr lang="en-US" sz="1140" dirty="0"/>
           </a:p>
@@ -4002,7 +4002,7 @@
                 <a:ea typeface="Calibri" pitchFamily="34" charset="-122"/>
                 <a:cs typeface="Calibri" pitchFamily="34" charset="-120"/>
               </a:rPr>
-              <a:t>El contraste con la práctica real de la contratación y la lectura crítica de los borradores son de los servicios técnicos municipales, y se reconocen de forma colectiva y deliberada. Las cuatro dificultades del §M1.1 son la razón de ser de esta versión y se responden una a una en el cuerpo del documento. Ningún órgano de contratación, intervención o asesoría jurídica se ha pronunciado sobre el catálogo.</a:t>
+              <a:t>El contraste con la práctica real de la contratación y la lectura crítica de los borradores son de los servicios técnicos municipales, y se les reconoce de forma colectiva: sus aportaciones han sido voluntarias, desinteresadas y orientadas al interés general. Las cuatro dificultades del §M1.1 son la razón de ser de esta versión y se responden una a una en el cuerpo del documento. Ningún órgano de contratación, intervención o asesoría jurídica se ha pronunciado sobre el catálogo.</a:t>
             </a:r>
             <a:endParaRPr lang="en-US" sz="1100" dirty="0"/>
           </a:p>

--- a/docs/descargas/presentacion-ai-clauses.pptx
+++ b/docs/descargas/presentacion-ai-clauses.pptx
@@ -2267,7 +2267,7 @@
                 <a:ea typeface="Calibri" pitchFamily="34" charset="-122"/>
                 <a:cs typeface="Calibri" pitchFamily="34" charset="-120"/>
               </a:rPr>
-              <a:t>Versión 3.0 · septiembre de 2026 · publicado en abierto bajo licencia CC BY 4.0</a:t>
+              <a:t>Versión 4.0, definitiva —no aprobada por ningún órgano— · octubre de 2026 · publicada en abierto bajo licencia CC BY 4.0</a:t>
             </a:r>
             <a:endParaRPr lang="en-US" sz="1300" dirty="0"/>
           </a:p>
@@ -4002,7 +4002,7 @@
                 <a:ea typeface="Calibri" pitchFamily="34" charset="-122"/>
                 <a:cs typeface="Calibri" pitchFamily="34" charset="-120"/>
               </a:rPr>
-              <a:t>El contraste con la práctica real de la contratación y la lectura crítica de los borradores son de los servicios técnicos municipales, y se les reconoce de forma colectiva: sus aportaciones han sido voluntarias, desinteresadas y orientadas al interés general. Las cuatro dificultades del §M1.1 son la razón de ser de esta versión y se responden una a una en el cuerpo del documento. Ningún órgano de contratación, intervención o asesoría jurídica se ha pronunciado sobre el catálogo.</a:t>
+              <a:t>El contraste con la práctica real de la contratación y la lectura crítica de los borradores son de los servicios técnicos municipales, y se les reconoce de forma colectiva: sus aportaciones han sido voluntarias, desinteresadas y orientadas al interés general. Las cuatro dificultades del §M1.1 son la razón de ser de esta versión y se responden una a una en el cuerpo del documento. Ningún órgano de contratación, intervención o asesoría jurídica ha emitido informe sobre el catálogo ni lo ha aprobado.</a:t>
             </a:r>
             <a:endParaRPr lang="en-US" sz="1100" dirty="0"/>
           </a:p>
@@ -4523,7 +4523,7 @@
                 <a:ea typeface="Calibri" pitchFamily="34" charset="-122"/>
                 <a:cs typeface="Calibri" pitchFamily="34" charset="-120"/>
               </a:rPr>
-              <a:t>github.com/migueldadd4u/ai-clauses</a:t>
+              <a:t>migueldadd4u.github.io/ai-clauses</a:t>
             </a:r>
             <a:endParaRPr lang="en-US" sz="2200" dirty="0"/>
           </a:p>
@@ -8041,7 +8041,7 @@
                 <a:ea typeface="Calibri" pitchFamily="34" charset="-122"/>
                 <a:cs typeface="Calibri" pitchFamily="34" charset="-120"/>
               </a:rPr>
-              <a:t>Quien controla no puede imponer instrumentos, pero sí necesita el dato al mismo rango que quien gestiona. De ahí ADM-12: sin tarificar, en formato abierto y con diccionario de datos.</a:t>
+              <a:t>Quien controla no puede imponer instrumentos, pero sí necesita acceso propio al dato de ejecución, sin depender del proveedor. De ahí ADM-12: sin tarificar, en formato abierto y con diccionario de datos.</a:t>
             </a:r>
             <a:endParaRPr lang="en-US" sz="1200" dirty="0"/>
           </a:p>
